--- a/HW0/hw0_xuechao_zhang.pptx
+++ b/HW0/hw0_xuechao_zhang.pptx
@@ -110,6 +110,11 @@
       </a:defRPr>
     </a:lvl9pPr>
   </p:defaultTextStyle>
+  <p:extLst>
+    <p:ext uri="{EFAFB233-063F-42B5-8137-9DF3F51BA10A}">
+      <p15:sldGuideLst xmlns:p15="http://schemas.microsoft.com/office/powerpoint/2012/main"/>
+    </p:ext>
+  </p:extLst>
 </p:presentation>
 </file>
 
@@ -4349,6 +4354,48 @@
           </a:p>
         </p:txBody>
       </p:sp>
+      <p:sp>
+        <p:nvSpPr>
+          <p:cNvPr id="3" name="文本框 2">
+            <a:extLst>
+              <a:ext uri="{FF2B5EF4-FFF2-40B4-BE49-F238E27FC236}">
+                <a16:creationId xmlns:a16="http://schemas.microsoft.com/office/drawing/2014/main" id="{CF7E7C4C-779C-6A19-002A-020F43DEF663}"/>
+              </a:ext>
+            </a:extLst>
+          </p:cNvPr>
+          <p:cNvSpPr txBox="1"/>
+          <p:nvPr/>
+        </p:nvSpPr>
+        <p:spPr>
+          <a:xfrm>
+            <a:off x="404886" y="-780446"/>
+            <a:ext cx="8066632" cy="646331"/>
+          </a:xfrm>
+          <a:prstGeom prst="rect">
+            <a:avLst/>
+          </a:prstGeom>
+          <a:noFill/>
+        </p:spPr>
+        <p:txBody>
+          <a:bodyPr wrap="none" rtlCol="0">
+            <a:spAutoFit/>
+          </a:bodyPr>
+          <a:lstStyle/>
+          <a:p>
+            <a:r>
+              <a:rPr kumimoji="1" lang="en" altLang="zh-CN" dirty="0"/>
+              <a:t>There are many new concepts here</a:t>
+            </a:r>
+          </a:p>
+          <a:p>
+            <a:r>
+              <a:rPr kumimoji="1" lang="en" altLang="zh-CN" dirty="0"/>
+              <a:t>This picture just doesn't look like it belongs in the same era as the other papers.</a:t>
+            </a:r>
+            <a:endParaRPr kumimoji="1" lang="zh-CN" altLang="en-US" dirty="0"/>
+          </a:p>
+        </p:txBody>
+      </p:sp>
     </p:spTree>
     <p:extLst>
       <p:ext uri="{BB962C8B-B14F-4D97-AF65-F5344CB8AC3E}">
@@ -4533,27 +4580,7 @@
                 <a:effectLst/>
                 <a:latin typeface="Helvetica Neue" panose="02000503000000020004" pitchFamily="2" charset="0"/>
               </a:rPr>
-              <a:t>(</a:t>
-            </a:r>
-            <a:r>
-              <a:rPr lang="en-US" altLang="zh-CN" sz="2000" b="1" dirty="0" err="1">
-                <a:solidFill>
-                  <a:srgbClr val="1D1D1D"/>
-                </a:solidFill>
-                <a:effectLst/>
-                <a:latin typeface="Helvetica Neue" panose="02000503000000020004" pitchFamily="2" charset="0"/>
-              </a:rPr>
-              <a:t>Pokemon</a:t>
-            </a:r>
-            <a:r>
-              <a:rPr lang="en-US" altLang="zh-CN" sz="2000" b="1" dirty="0">
-                <a:solidFill>
-                  <a:srgbClr val="1D1D1D"/>
-                </a:solidFill>
-                <a:effectLst/>
-                <a:latin typeface="Helvetica Neue" panose="02000503000000020004" pitchFamily="2" charset="0"/>
-              </a:rPr>
-              <a:t>)</a:t>
+              <a:t>(Pokémon)</a:t>
             </a:r>
             <a:endParaRPr lang="en" altLang="zh-CN" sz="2000" b="1" dirty="0">
               <a:solidFill>
